--- a/Report/R2.pptx
+++ b/Report/R2.pptx
@@ -3687,35 +3687,35 @@
           <a:p>
             <a:r>
               <a:rPr lang="zh-CN" altLang="en-US">
-                <a:ea typeface="SimSun" panose="02010600030101010101" pitchFamily="2" charset="-122"/>
+                <a:ea typeface="宋体" panose="02010600030101010101" pitchFamily="2" charset="-122"/>
               </a:rPr>
               <a:t>人在进行 </a:t>
             </a:r>
             <a:r>
               <a:rPr lang="en-US" altLang="zh-CN">
-                <a:ea typeface="SimSun" panose="02010600030101010101" pitchFamily="2" charset="-122"/>
+                <a:ea typeface="宋体" panose="02010600030101010101" pitchFamily="2" charset="-122"/>
               </a:rPr>
               <a:t>reach-to-grasp </a:t>
             </a:r>
             <a:r>
               <a:rPr lang="zh-CN" altLang="en-US">
-                <a:ea typeface="SimSun" panose="02010600030101010101" pitchFamily="2" charset="-122"/>
+                <a:ea typeface="宋体" panose="02010600030101010101" pitchFamily="2" charset="-122"/>
               </a:rPr>
               <a:t>动作时，手指开合和手部运动通常是自然且无意识地协调进行的。</a:t>
             </a:r>
             <a:endParaRPr lang="zh-CN" altLang="en-US">
-              <a:ea typeface="SimSun" panose="02010600030101010101" pitchFamily="2" charset="-122"/>
+              <a:ea typeface="宋体" panose="02010600030101010101" pitchFamily="2" charset="-122"/>
             </a:endParaRPr>
           </a:p>
           <a:p>
             <a:r>
               <a:rPr lang="zh-CN" altLang="en-US">
-                <a:ea typeface="SimSun" panose="02010600030101010101" pitchFamily="2" charset="-122"/>
+                <a:ea typeface="宋体" panose="02010600030101010101" pitchFamily="2" charset="-122"/>
               </a:rPr>
               <a:t>本研究旨在分析抓取过程中物体视觉大小、手指开合以及手部运动之间的关系，并进一步研究是否能够利用这些信息预测手指的开合过程。</a:t>
             </a:r>
             <a:endParaRPr lang="zh-CN" altLang="en-US">
-              <a:ea typeface="SimSun" panose="02010600030101010101" pitchFamily="2" charset="-122"/>
+              <a:ea typeface="宋体" panose="02010600030101010101" pitchFamily="2" charset="-122"/>
             </a:endParaRPr>
           </a:p>
         </p:txBody>
@@ -3896,16 +3896,89 @@
             <a:r>
               <a:rPr lang="zh-CN" altLang="en-US" sz="3200" b="1">
                 <a:latin typeface="Times New Roman" panose="02020603050405020304"/>
-                <a:ea typeface="SimSun" panose="02010600030101010101" pitchFamily="2" charset="-122"/>
+                <a:ea typeface="宋体" panose="02010600030101010101" pitchFamily="2" charset="-122"/>
                 <a:cs typeface="Times New Roman" panose="02020603050405020304"/>
               </a:rPr>
               <a:t>数据集准备</a:t>
             </a:r>
             <a:endParaRPr lang="zh-CN" altLang="en-US" sz="3200" b="1">
               <a:latin typeface="Times New Roman" panose="02020603050405020304"/>
-              <a:ea typeface="SimSun" panose="02010600030101010101" pitchFamily="2" charset="-122"/>
+              <a:ea typeface="宋体" panose="02010600030101010101" pitchFamily="2" charset="-122"/>
               <a:cs typeface="Times New Roman" panose="02020603050405020304"/>
             </a:endParaRPr>
+          </a:p>
+        </p:txBody>
+      </p:sp>
+      <p:pic>
+        <p:nvPicPr>
+          <p:cNvPr id="8" name="10月4日">
+            <a:hlinkClick r:id="" action="ppaction://media"/>
+          </p:cNvPr>
+          <p:cNvPicPr/>
+          <p:nvPr>
+            <a:videoFile r:link="rId1"/>
+            <p:extLst>
+              <p:ext uri="{DAA4B4D4-6D71-4841-9C94-3DE7FCFB9230}">
+                <p14:media xmlns:p14="http://schemas.microsoft.com/office/powerpoint/2010/main" r:embed="rId2"/>
+              </p:ext>
+            </p:extLst>
+          </p:nvPr>
+        </p:nvPicPr>
+        <p:blipFill>
+          <a:blip r:embed="rId3"/>
+          <a:stretch>
+            <a:fillRect/>
+          </a:stretch>
+        </p:blipFill>
+        <p:spPr>
+          <a:xfrm>
+            <a:off x="275590" y="2588895"/>
+            <a:ext cx="6949440" cy="4073525"/>
+          </a:xfrm>
+          <a:prstGeom prst="rect">
+            <a:avLst/>
+          </a:prstGeom>
+        </p:spPr>
+      </p:pic>
+      <p:sp>
+        <p:nvSpPr>
+          <p:cNvPr id="2" name="文本框 1"/>
+          <p:cNvSpPr txBox="1"/>
+          <p:nvPr/>
+        </p:nvSpPr>
+        <p:spPr>
+          <a:xfrm>
+            <a:off x="275590" y="894080"/>
+            <a:ext cx="8522335" cy="922020"/>
+          </a:xfrm>
+          <a:prstGeom prst="rect">
+            <a:avLst/>
+          </a:prstGeom>
+        </p:spPr>
+        <p:txBody>
+          <a:bodyPr wrap="square">
+            <a:spAutoFit/>
+          </a:bodyPr>
+          <a:p>
+            <a:r>
+              <a:rPr lang="en-US" altLang="zh-CN"/>
+              <a:t>Initial hand position: table edge</a:t>
+            </a:r>
+            <a:endParaRPr lang="en-US" altLang="zh-CN"/>
+          </a:p>
+          <a:p>
+            <a:r>
+              <a:rPr lang="en-US" altLang="zh-CN"/>
+              <a:t>Target position: 30 mm from the table edge</a:t>
+            </a:r>
+            <a:endParaRPr lang="en-US" altLang="zh-CN"/>
+          </a:p>
+          <a:p>
+            <a:r>
+              <a:rPr lang="en-US" altLang="zh-CN"/>
+              <a:t>Task: natural reach-to-grasp movement</a:t>
+            </a:r>
+            <a:endParaRPr lang="en-US" altLang="zh-CN"/>
           </a:p>
         </p:txBody>
       </p:sp>
@@ -3917,7 +3990,80 @@
   <p:timing>
     <p:tnLst>
       <p:par>
-        <p:cTn id="1" dur="indefinite" restart="never" nodeType="tmRoot"/>
+        <p:cTn id="1" dur="indefinite" restart="never" nodeType="tmRoot">
+          <p:childTnLst>
+            <p:video fullScrn="0">
+              <p:cMediaNode>
+                <p:cTn id="2" fill="hold" display="1">
+                  <p:stCondLst>
+                    <p:cond delay="indefinite"/>
+                  </p:stCondLst>
+                </p:cTn>
+                <p:tgtEl>
+                  <p:spTgt spid="8"/>
+                </p:tgtEl>
+              </p:cMediaNode>
+            </p:video>
+            <p:seq concurrent="1" nextAc="seek">
+              <p:cTn id="3" restart="whenNotActive" fill="hold" evtFilter="cancelBubble" nodeType="interactiveSeq">
+                <p:stCondLst>
+                  <p:cond evt="onClick" delay="0">
+                    <p:tgtEl>
+                      <p:spTgt spid="8"/>
+                    </p:tgtEl>
+                  </p:cond>
+                </p:stCondLst>
+                <p:endSync evt="end" delay="0">
+                  <p:rtn val="all"/>
+                </p:endSync>
+                <p:childTnLst>
+                  <p:par>
+                    <p:cTn id="4" fill="hold">
+                      <p:stCondLst>
+                        <p:cond delay="0"/>
+                      </p:stCondLst>
+                      <p:childTnLst>
+                        <p:par>
+                          <p:cTn id="5" fill="hold">
+                            <p:stCondLst>
+                              <p:cond delay="0"/>
+                            </p:stCondLst>
+                            <p:childTnLst>
+                              <p:par>
+                                <p:cTn id="6" presetID="2" presetClass="mediacall" presetSubtype="0" fill="hold" nodeType="clickEffect">
+                                  <p:stCondLst>
+                                    <p:cond delay="0"/>
+                                  </p:stCondLst>
+                                  <p:childTnLst>
+                                    <p:cmd type="call" cmd="togglePause">
+                                      <p:cBhvr additive="base">
+                                        <p:cTn id="7" dur="1" fill="hold"/>
+                                        <p:tgtEl>
+                                          <p:spTgt spid="8"/>
+                                        </p:tgtEl>
+                                      </p:cBhvr>
+                                    </p:cmd>
+                                  </p:childTnLst>
+                                </p:cTn>
+                              </p:par>
+                            </p:childTnLst>
+                          </p:cTn>
+                        </p:par>
+                      </p:childTnLst>
+                    </p:cTn>
+                  </p:par>
+                </p:childTnLst>
+              </p:cTn>
+              <p:nextCondLst>
+                <p:cond evt="onClick" delay="0">
+                  <p:tgtEl>
+                    <p:spTgt spid="8"/>
+                  </p:tgtEl>
+                </p:cond>
+              </p:nextCondLst>
+            </p:seq>
+          </p:childTnLst>
+        </p:cTn>
       </p:par>
     </p:tnLst>
   </p:timing>
